--- a/docs/presentation.pptx
+++ b/docs/presentation.pptx
@@ -3695,7 +3695,7 @@
                 <a:cs typeface="Proxima Nova"/>
                 <a:sym typeface="Proxima Nova"/>
               </a:rPr>
-              <a:t>Граф 680+ узлов: материалы, процессы, эксперты, лаборатории, публикации</a:t>
+              <a:t>Граф 747 узлов, 12 типов онтологии · 5 отраслевых журналов + open-access</a:t>
             </a:r>
             <a:endParaRPr sz="1800">
               <a:solidFill>
@@ -3727,7 +3727,7 @@
                 <a:cs typeface="Proxima Nova"/>
                 <a:sym typeface="Proxima Nova"/>
               </a:rPr>
-              <a:t>Демо: обессоливание воды, циркуляция католита, Au/Ag/МПГ, шахтные воды</a:t>
+              <a:t>Демо: обессоливание, циркуляция католита, Au/Ag/МПГ, шахтные воды (RU/EN)</a:t>
             </a:r>
             <a:endParaRPr sz="1800">
               <a:solidFill>
@@ -3759,7 +3759,7 @@
                 <a:cs typeface="Proxima Nova"/>
                 <a:sym typeface="Proxima Nova"/>
               </a:rPr>
-              <a:t>Верификация фактов, версионирование, RBAC + аудит, уведомления</a:t>
+              <a:t>F1 извлечения: сущности 0,64 · атрибуты 0,70 · ретривал медиана ~0,45 с</a:t>
             </a:r>
             <a:endParaRPr sz="1800">
               <a:solidFill>
@@ -3791,7 +3791,7 @@
                 <a:cs typeface="Proxima Nova"/>
                 <a:sym typeface="Proxima Nova"/>
               </a:rPr>
-              <a:t>Дашборд руководителя, граф-визуализация с подсветкой достоверности</a:t>
+              <a:t>Верификация, версионирование фактов, RBAC + аудит, уведомления, дашборд</a:t>
             </a:r>
             <a:endParaRPr sz="1800">
               <a:solidFill>
@@ -3823,7 +3823,7 @@
                 <a:cs typeface="Proxima Nova"/>
                 <a:sym typeface="Proxima Nova"/>
               </a:rPr>
-              <a:t>64 теста зелёных · Docker Compose · GPU не нужен, 32 ГБ RAM достаточно</a:t>
+              <a:t>68 тестов зелёных · Docker Compose одной командой · GPU не нужен</a:t>
             </a:r>
             <a:endParaRPr sz="1800">
               <a:solidFill>

--- a/docs/presentation.pptx
+++ b/docs/presentation.pptx
@@ -759,19 +759,9 @@
           </a:bodyPr>
           <a:lstStyle/>
           <a:p>
-            <a:pPr indent="0" lvl="0" marL="0" rtl="0" algn="l">
-              <a:spcBef>
-                <a:spcPts val="0"/>
-              </a:spcBef>
-              <a:spcAft>
-                <a:spcPts val="0"/>
-              </a:spcAft>
-              <a:buNone/>
-            </a:pPr>
-            <a:r>
-              <a:t/>
-            </a:r>
-            <a:endParaRPr/>
+            <a:r>
+              <a:t>Здравствуйте! Мы — команда трека «Научный клубок». За 30 секунд: проблема, за минуту — как устроено, дальше живое демо на ваших вопросах. Ключевая мысль: мы не «RAG поверх PDF», а граф знаний + гибридный поиск, и решение LLM-агностично — сегодня Yandex, в проде тот же код с MetalGPT-1.</a:t>
+            </a:r>
           </a:p>
         </p:txBody>
       </p:sp>
@@ -858,19 +848,9 @@
           </a:bodyPr>
           <a:lstStyle/>
           <a:p>
-            <a:pPr indent="0" lvl="0" marL="0" rtl="0" algn="l">
-              <a:spcBef>
-                <a:spcPts val="0"/>
-              </a:spcBef>
-              <a:spcAft>
-                <a:spcPts val="0"/>
-              </a:spcAft>
-              <a:buNone/>
-            </a:pPr>
-            <a:r>
-              <a:t/>
-            </a:r>
-            <a:endParaRPr/>
+            <a:r>
+              <a:t>В точке ноль проблема не в отсутствии моделей, а в отсутствии структуры. Знания R&amp;D рассеяны: команды дублируют литобзоры, нет междисциплинарного поиска, ответ на техвопрос = ручной сбор из десятков источников, противоречия без единой базы. Пять болей — прямо из вашего ТЗ.</a:t>
+            </a:r>
           </a:p>
         </p:txBody>
       </p:sp>
@@ -957,19 +937,9 @@
           </a:bodyPr>
           <a:lstStyle/>
           <a:p>
-            <a:pPr indent="0" lvl="0" marL="0" rtl="0" algn="l">
-              <a:spcBef>
-                <a:spcPts val="0"/>
-              </a:spcBef>
-              <a:spcAft>
-                <a:spcPts val="0"/>
-              </a:spcAft>
-              <a:buNone/>
-            </a:pPr>
-            <a:r>
-              <a:t/>
-            </a:r>
-            <a:endParaRPr/>
+            <a:r>
+              <a:t>Мы связываем публикации, эксперименты, материалы, оборудование, экспертов в один граф. Поиск гибридный: вектор находит смысл, граф даёт структуру и провенанс. Каждый ответ — с цитатой, уровнем достоверности и датой. Фильтры распознаются прямо из вопроса: числа, география РФ/мир, годы. Плюс поиск пробелов, сравнение технологий, эксперты, экспорт.</a:t>
+            </a:r>
           </a:p>
         </p:txBody>
       </p:sp>
@@ -1056,19 +1026,9 @@
           </a:bodyPr>
           <a:lstStyle/>
           <a:p>
-            <a:pPr indent="0" lvl="0" marL="0" rtl="0" algn="l">
-              <a:spcBef>
-                <a:spcPts val="0"/>
-              </a:spcBef>
-              <a:spcAft>
-                <a:spcPts val="0"/>
-              </a:spcAft>
-              <a:buNone/>
-            </a:pPr>
-            <a:r>
-              <a:t/>
-            </a:r>
-            <a:endParaRPr/>
+            <a:r>
+              <a:t>Пайплайн: парсинг → извлечение LLM в строгий JSON по онтологии → Neo4j + Qdrant. Запрос: вектор → seed-узлы → обход графа 1–4 хопа → реранк → генерация. Главный козырь — сменные бэкенды: YandexGPT сегодня, MetalGPT-1 on-prem в проде (клиент готов). Эмбеддинги локальные (ONNX) — без квоты и GPU. Ретривал 0,1–2,6 с — вдвое-вдесятеро быстрее бюджета ТЗ.</a:t>
+            </a:r>
           </a:p>
         </p:txBody>
       </p:sp>
@@ -1155,19 +1115,67 @@
           </a:bodyPr>
           <a:lstStyle/>
           <a:p>
-            <a:pPr indent="0" lvl="0" marL="0" rtl="0" algn="l">
-              <a:spcBef>
-                <a:spcPts val="0"/>
-              </a:spcBef>
-              <a:spcAft>
-                <a:spcPts val="0"/>
-              </a:spcAft>
-              <a:buNone/>
-            </a:pPr>
-            <a:r>
-              <a:t/>
-            </a:r>
-            <a:endParaRPr/>
+            <a:r>
+              <a:t>Сейчас покажу вживую. [Демо: задать вопрос про католит → показать граф, провенанс, фильтры; затем литобзор; затем пробелы.] Граф 747 узлов, 12 типов онтологии. F1 извлечения 0,64, атрибуты 0,70. 68 тестов зелёных. Поднимается одной командой docker compose, без GPU.</a:t>
+            </a:r>
+          </a:p>
+        </p:txBody>
+      </p:sp>
+    </p:spTree>
+  </p:cSld>
+  <p:clrMapOvr>
+    <a:masterClrMapping/>
+  </p:clrMapOvr>
+</p:notes>
+</file>
+
+<file path=ppt/notesSlides/notesSlide6.xml><?xml version="1.0" encoding="utf-8"?>
+<p:notes xmlns:a="http://schemas.openxmlformats.org/drawingml/2006/main" xmlns:p="http://schemas.openxmlformats.org/presentationml/2006/main" xmlns:r="http://schemas.openxmlformats.org/officeDocument/2006/relationships">
+  <p:cSld>
+    <p:spTree>
+      <p:nvGrpSpPr>
+        <p:cNvPr id="1" name=""/>
+        <p:cNvGrpSpPr/>
+        <p:nvPr/>
+      </p:nvGrpSpPr>
+      <p:grpSpPr>
+        <a:xfrm>
+          <a:off x="0" y="0"/>
+          <a:ext cx="0" cy="0"/>
+          <a:chOff x="0" y="0"/>
+          <a:chExt cx="0" cy="0"/>
+        </a:xfrm>
+      </p:grpSpPr>
+      <p:sp>
+        <p:nvSpPr>
+          <p:cNvPr id="2" name="Slide Image Placeholder 1"/>
+          <p:cNvSpPr>
+            <a:spLocks noGrp="1"/>
+          </p:cNvSpPr>
+          <p:nvPr>
+            <p:ph type="sldImg" idx="2"/>
+          </p:nvPr>
+        </p:nvSpPr>
+        <p:spPr/>
+      </p:sp>
+      <p:sp>
+        <p:nvSpPr>
+          <p:cNvPr id="3" name="Notes Placeholder 2"/>
+          <p:cNvSpPr>
+            <a:spLocks noGrp="1"/>
+          </p:cNvSpPr>
+          <p:nvPr>
+            <p:ph type="body" idx="1"/>
+          </p:nvPr>
+        </p:nvSpPr>
+        <p:spPr/>
+        <p:txBody>
+          <a:bodyPr/>
+          <a:lstStyle/>
+          <a:p>
+            <a:r>
+              <a:t>Все блоки ТЗ закрыты: многопараметрические запросы, модель верификации, РФ/мир, числовые диапазоны, версионирование, RBAC + аудит, уведомления, экспорт, дашборд. Прод-трек — тот же код с MetalGPT-1. Дальше: полный корпус, каталоги экспериментов, справочники. Готово к пилоту в НИИ. Спасибо, готовы к вопросам.</a:t>
+            </a:r>
           </a:p>
         </p:txBody>
       </p:sp>
